--- a/docs/content/wrangling/wrangling_lecture.pptx
+++ b/docs/content/wrangling/wrangling_lecture.pptx
@@ -3356,7 +3356,7 @@
             </a:pPr>
             <a:r>
               <a:rPr/>
-              <a:t>2026-08-27</a:t>
+              <a:t>2026-09-01</a:t>
             </a:r>
           </a:p>
         </p:txBody>

--- a/docs/content/wrangling/wrangling_lecture.pptx
+++ b/docs/content/wrangling/wrangling_lecture.pptx
@@ -3356,7 +3356,7 @@
             </a:pPr>
             <a:r>
               <a:rPr/>
-              <a:t>2026-09-01</a:t>
+              <a:t>2026-09-03</a:t>
             </a:r>
           </a:p>
         </p:txBody>

--- a/docs/content/wrangling/wrangling_lecture.pptx
+++ b/docs/content/wrangling/wrangling_lecture.pptx
@@ -3356,7 +3356,7 @@
             </a:pPr>
             <a:r>
               <a:rPr/>
-              <a:t>2026-09-03</a:t>
+              <a:t>2026-09-04</a:t>
             </a:r>
           </a:p>
         </p:txBody>
